--- a/outputs/outlook-signals-presentation.pptx
+++ b/outputs/outlook-signals-presentation.pptx
@@ -2,23 +2,23 @@
 <file path=ppt/presentation.xml><?xml version="1.0" encoding="utf-8"?>
 <p:presentation xmlns:p="http://schemas.openxmlformats.org/presentationml/2006/main">
   <p:sldMasterIdLst>
-    <p:sldMasterId xmlns:r="http://schemas.openxmlformats.org/officeDocument/2006/relationships" id="2147483648" r:id="Rdb699148c85d4fe6"/>
+    <p:sldMasterId xmlns:r="http://schemas.openxmlformats.org/officeDocument/2006/relationships" id="2147483648" r:id="R81e5485199d74039"/>
   </p:sldMasterIdLst>
   <p:notesMasterIdLst>
-    <p:notesMasterId xmlns:r="http://schemas.openxmlformats.org/officeDocument/2006/relationships" r:id="R547729ba1f2047f4"/>
+    <p:notesMasterId xmlns:r="http://schemas.openxmlformats.org/officeDocument/2006/relationships" r:id="Rcd5d98e7dd294448"/>
   </p:notesMasterIdLst>
   <p:sldIdLst>
-    <p:sldId xmlns:r="http://schemas.openxmlformats.org/officeDocument/2006/relationships" id="256" r:id="R7919a82b9976414b"/>
-    <p:sldId xmlns:r="http://schemas.openxmlformats.org/officeDocument/2006/relationships" id="257" r:id="R93b7a8f3acfc463f"/>
-    <p:sldId xmlns:r="http://schemas.openxmlformats.org/officeDocument/2006/relationships" id="258" r:id="R499b1020d489408e"/>
-    <p:sldId xmlns:r="http://schemas.openxmlformats.org/officeDocument/2006/relationships" id="259" r:id="R649ee232dcfc4cbe"/>
-    <p:sldId xmlns:r="http://schemas.openxmlformats.org/officeDocument/2006/relationships" id="260" r:id="Rb047a9bd2c2b4efe"/>
-    <p:sldId xmlns:r="http://schemas.openxmlformats.org/officeDocument/2006/relationships" id="261" r:id="R840e0a2ccd6644d0"/>
-    <p:sldId xmlns:r="http://schemas.openxmlformats.org/officeDocument/2006/relationships" id="262" r:id="Ra925e4b344e24441"/>
-    <p:sldId xmlns:r="http://schemas.openxmlformats.org/officeDocument/2006/relationships" id="263" r:id="R60432532acbe486d"/>
-    <p:sldId xmlns:r="http://schemas.openxmlformats.org/officeDocument/2006/relationships" id="264" r:id="Ra9ee1de950814bf3"/>
-    <p:sldId xmlns:r="http://schemas.openxmlformats.org/officeDocument/2006/relationships" id="265" r:id="Rfb2698332ee3478a"/>
-    <p:sldId xmlns:r="http://schemas.openxmlformats.org/officeDocument/2006/relationships" id="266" r:id="R51cb5f82e0964635"/>
+    <p:sldId xmlns:r="http://schemas.openxmlformats.org/officeDocument/2006/relationships" id="256" r:id="R2d57423e34704d9c"/>
+    <p:sldId xmlns:r="http://schemas.openxmlformats.org/officeDocument/2006/relationships" id="257" r:id="Rec1b9efb7314456a"/>
+    <p:sldId xmlns:r="http://schemas.openxmlformats.org/officeDocument/2006/relationships" id="258" r:id="Rdc1041adff1f41cb"/>
+    <p:sldId xmlns:r="http://schemas.openxmlformats.org/officeDocument/2006/relationships" id="259" r:id="Re4cd8d20ef794bf2"/>
+    <p:sldId xmlns:r="http://schemas.openxmlformats.org/officeDocument/2006/relationships" id="260" r:id="R9d59f7be97ec46fe"/>
+    <p:sldId xmlns:r="http://schemas.openxmlformats.org/officeDocument/2006/relationships" id="261" r:id="Rce7b9db566814601"/>
+    <p:sldId xmlns:r="http://schemas.openxmlformats.org/officeDocument/2006/relationships" id="262" r:id="Rf1391f43c11d44e1"/>
+    <p:sldId xmlns:r="http://schemas.openxmlformats.org/officeDocument/2006/relationships" id="263" r:id="Rd5d6db99232144bc"/>
+    <p:sldId xmlns:r="http://schemas.openxmlformats.org/officeDocument/2006/relationships" id="264" r:id="Ra831dbeddb634b4d"/>
+    <p:sldId xmlns:r="http://schemas.openxmlformats.org/officeDocument/2006/relationships" id="265" r:id="Rd61c7f6ff82a4d22"/>
+    <p:sldId xmlns:r="http://schemas.openxmlformats.org/officeDocument/2006/relationships" id="266" r:id="R6802ec6bca584122"/>
   </p:sldIdLst>
   <p:sldSz cx="12192000" cy="6858000"/>
   <p:notesSz cx="6858000" cy="9144000"/>
@@ -1271,7 +1271,7 @@
   </p:cSld>
   <p:clrMap bg1="lt1" tx1="dk1" bg2="lt2" tx2="dk2" accent1="accent1" accent2="accent2" accent3="accent3" accent4="accent4" accent5="accent5" accent6="accent6" hlink="hlink" folHlink="folHlink"/>
   <p:sldLayoutIdLst>
-    <p:sldLayoutId xmlns:r="http://schemas.openxmlformats.org/officeDocument/2006/relationships" id="2147483649" r:id="R80479f4275f94ae2"/>
+    <p:sldLayoutId xmlns:r="http://schemas.openxmlformats.org/officeDocument/2006/relationships" id="2147483649" r:id="Rfb03e9455c3a441f"/>
   </p:sldLayoutIdLst>
   <p:txStyles>
     <p:titleStyle>
@@ -1819,21 +1819,21 @@
       </p:grpSpPr>
       <p:pic>
         <p:nvPicPr>
-          <p:cNvPr id="9" name=""/>
+          <p:cNvPr id="10" name=""/>
           <p:cNvPicPr>
             <a:picLocks xmlns:a="http://schemas.openxmlformats.org/drawingml/2006/main" noChangeAspect="1"/>
           </p:cNvPicPr>
           <p:nvPr/>
         </p:nvPicPr>
         <p:blipFill>
-          <a:blip xmlns:r="http://schemas.openxmlformats.org/officeDocument/2006/relationships" xmlns:a="http://schemas.openxmlformats.org/drawingml/2006/main" r:embed="R6800d64897ed4c5d"/>
+          <a:blip xmlns:r="http://schemas.openxmlformats.org/officeDocument/2006/relationships" xmlns:a="http://schemas.openxmlformats.org/drawingml/2006/main" r:embed="Rf08d9210c9d14b20"/>
           <a:srcRect xmlns:a="http://schemas.openxmlformats.org/drawingml/2006/main" l="23166" t="0" r="23166" b="0"/>
           <a:stretch xmlns:a="http://schemas.openxmlformats.org/drawingml/2006/main">
             <a:fillRect l="0" t="0" r="0" b="0"/>
           </a:stretch>
         </p:blipFill>
         <p:spPr>
-          <a:xfrm xmlns:a="http://schemas.openxmlformats.org/drawingml/2006/main">
+          <a:xfrm xmlns:a="http://schemas.openxmlformats.org/drawingml/2006/main" flipH="0" flipV="0">
             <a:off x="6191250" y="514350"/>
             <a:ext cx="5543550" cy="5810250"/>
           </a:xfrm>
@@ -1938,6 +1938,7 @@
           <a:lstStyle xmlns:a="http://schemas.openxmlformats.org/drawingml/2006/main"/>
           <a:p xmlns:a="http://schemas.openxmlformats.org/drawingml/2006/main">
             <a:pPr algn="l">
+              <a:buNone/>
               <a:defRPr sz="1350" b="1">
                 <a:solidFill>
                   <a:srgbClr val="B76043"/>
@@ -1948,7 +1949,7 @@
               </a:defRPr>
             </a:pPr>
             <a:r>
-              <a:t>OUTLOOK SIGNALS</a:t>
+              <a:t>OUTLOOK AI SIGNALS</a:t>
             </a:r>
           </a:p>
         </p:txBody>
@@ -1983,6 +1984,7 @@
           <a:lstStyle xmlns:a="http://schemas.openxmlformats.org/drawingml/2006/main"/>
           <a:p xmlns:a="http://schemas.openxmlformats.org/drawingml/2006/main">
             <a:pPr algn="l">
+              <a:buNone/>
               <a:defRPr sz="4350" b="1">
                 <a:solidFill>
                   <a:srgbClr val="24211D"/>
@@ -2029,6 +2031,7 @@
           <a:lstStyle xmlns:a="http://schemas.openxmlformats.org/drawingml/2006/main"/>
           <a:p xmlns:a="http://schemas.openxmlformats.org/drawingml/2006/main">
             <a:pPr algn="l">
+              <a:buNone/>
               <a:defRPr sz="1800" b="0">
                 <a:solidFill>
                   <a:srgbClr val="716B63"/>
@@ -2110,6 +2113,7 @@
           <a:lstStyle xmlns:a="http://schemas.openxmlformats.org/drawingml/2006/main"/>
           <a:p xmlns:a="http://schemas.openxmlformats.org/drawingml/2006/main">
             <a:pPr algn="ctr">
+              <a:buNone/>
               <a:defRPr sz="1200" b="1">
                 <a:solidFill>
                   <a:srgbClr val="667E95"/>
@@ -2184,6 +2188,7 @@
           <a:lstStyle xmlns:a="http://schemas.openxmlformats.org/drawingml/2006/main"/>
           <a:p xmlns:a="http://schemas.openxmlformats.org/drawingml/2006/main">
             <a:pPr algn="l">
+              <a:buNone/>
               <a:defRPr sz="1125" b="1">
                 <a:solidFill>
                   <a:srgbClr val="B76043"/>
@@ -2194,7 +2199,7 @@
               </a:defRPr>
             </a:pPr>
             <a:r>
-              <a:t>OUTLOOK SIGNALS</a:t>
+              <a:t>OUTLOOK AI SIGNALS</a:t>
             </a:r>
           </a:p>
         </p:txBody>
@@ -2229,6 +2234,7 @@
           <a:lstStyle xmlns:a="http://schemas.openxmlformats.org/drawingml/2006/main"/>
           <a:p xmlns:a="http://schemas.openxmlformats.org/drawingml/2006/main">
             <a:pPr algn="l">
+              <a:buNone/>
               <a:defRPr sz="3150" b="1">
                 <a:solidFill>
                   <a:srgbClr val="24211D"/>
@@ -2246,7 +2252,7 @@
       </p:sp>
       <p:cxnSp>
         <p:nvCxnSpPr>
-          <p:cNvPr id="21" name=""/>
+          <p:cNvPr id="27" name=""/>
           <p:cNvCxnSpPr/>
           <p:nvPr/>
         </p:nvCxnSpPr>
@@ -2296,6 +2302,7 @@
           <a:lstStyle xmlns:a="http://schemas.openxmlformats.org/drawingml/2006/main"/>
           <a:p xmlns:a="http://schemas.openxmlformats.org/drawingml/2006/main">
             <a:pPr algn="r">
+              <a:buNone/>
               <a:defRPr sz="1050" b="0">
                 <a:solidFill>
                   <a:srgbClr val="716B63"/>
@@ -2341,6 +2348,7 @@
           <a:lstStyle xmlns:a="http://schemas.openxmlformats.org/drawingml/2006/main"/>
           <a:p xmlns:a="http://schemas.openxmlformats.org/drawingml/2006/main">
             <a:pPr algn="ctr">
+              <a:buNone/>
               <a:defRPr sz="1725" b="0">
                 <a:solidFill>
                   <a:srgbClr val="716B63"/>
@@ -2421,6 +2429,7 @@
           <a:lstStyle xmlns:a="http://schemas.openxmlformats.org/drawingml/2006/main"/>
           <a:p xmlns:a="http://schemas.openxmlformats.org/drawingml/2006/main">
             <a:pPr algn="l">
+              <a:buNone/>
               <a:defRPr sz="4050" b="1">
                 <a:solidFill>
                   <a:srgbClr val="B76043"/>
@@ -2466,6 +2475,7 @@
           <a:lstStyle xmlns:a="http://schemas.openxmlformats.org/drawingml/2006/main"/>
           <a:p xmlns:a="http://schemas.openxmlformats.org/drawingml/2006/main">
             <a:pPr algn="l">
+              <a:buNone/>
               <a:defRPr sz="1650" b="1">
                 <a:solidFill>
                   <a:srgbClr val="24211D"/>
@@ -2511,6 +2521,7 @@
           <a:lstStyle xmlns:a="http://schemas.openxmlformats.org/drawingml/2006/main"/>
           <a:p xmlns:a="http://schemas.openxmlformats.org/drawingml/2006/main">
             <a:pPr algn="l">
+              <a:buNone/>
               <a:defRPr sz="1350" b="0">
                 <a:solidFill>
                   <a:srgbClr val="716B63"/>
@@ -2591,6 +2602,7 @@
           <a:lstStyle xmlns:a="http://schemas.openxmlformats.org/drawingml/2006/main"/>
           <a:p xmlns:a="http://schemas.openxmlformats.org/drawingml/2006/main">
             <a:pPr algn="l">
+              <a:buNone/>
               <a:defRPr sz="4050" b="1">
                 <a:solidFill>
                   <a:srgbClr val="667E95"/>
@@ -2636,6 +2648,7 @@
           <a:lstStyle xmlns:a="http://schemas.openxmlformats.org/drawingml/2006/main"/>
           <a:p xmlns:a="http://schemas.openxmlformats.org/drawingml/2006/main">
             <a:pPr algn="l">
+              <a:buNone/>
               <a:defRPr sz="1650" b="1">
                 <a:solidFill>
                   <a:srgbClr val="24211D"/>
@@ -2681,6 +2694,7 @@
           <a:lstStyle xmlns:a="http://schemas.openxmlformats.org/drawingml/2006/main"/>
           <a:p xmlns:a="http://schemas.openxmlformats.org/drawingml/2006/main">
             <a:pPr algn="l">
+              <a:buNone/>
               <a:defRPr sz="1350" b="0">
                 <a:solidFill>
                   <a:srgbClr val="716B63"/>
@@ -2761,6 +2775,7 @@
           <a:lstStyle xmlns:a="http://schemas.openxmlformats.org/drawingml/2006/main"/>
           <a:p xmlns:a="http://schemas.openxmlformats.org/drawingml/2006/main">
             <a:pPr algn="l">
+              <a:buNone/>
               <a:defRPr sz="4050" b="1">
                 <a:solidFill>
                   <a:srgbClr val="B76043"/>
@@ -2806,6 +2821,7 @@
           <a:lstStyle xmlns:a="http://schemas.openxmlformats.org/drawingml/2006/main"/>
           <a:p xmlns:a="http://schemas.openxmlformats.org/drawingml/2006/main">
             <a:pPr algn="l">
+              <a:buNone/>
               <a:defRPr sz="1650" b="1">
                 <a:solidFill>
                   <a:srgbClr val="24211D"/>
@@ -2851,6 +2867,7 @@
           <a:lstStyle xmlns:a="http://schemas.openxmlformats.org/drawingml/2006/main"/>
           <a:p xmlns:a="http://schemas.openxmlformats.org/drawingml/2006/main">
             <a:pPr algn="l">
+              <a:buNone/>
               <a:defRPr sz="1350" b="0">
                 <a:solidFill>
                   <a:srgbClr val="716B63"/>
@@ -2896,6 +2913,7 @@
           <a:lstStyle xmlns:a="http://schemas.openxmlformats.org/drawingml/2006/main"/>
           <a:p xmlns:a="http://schemas.openxmlformats.org/drawingml/2006/main">
             <a:pPr algn="ctr">
+              <a:buNone/>
               <a:defRPr sz="1500" b="1">
                 <a:solidFill>
                   <a:srgbClr val="B76043"/>
@@ -2970,6 +2988,7 @@
           <a:lstStyle xmlns:a="http://schemas.openxmlformats.org/drawingml/2006/main"/>
           <a:p xmlns:a="http://schemas.openxmlformats.org/drawingml/2006/main">
             <a:pPr algn="l">
+              <a:buNone/>
               <a:defRPr sz="1350" b="1">
                 <a:solidFill>
                   <a:srgbClr val="F1DDD3"/>
@@ -2980,7 +2999,7 @@
               </a:defRPr>
             </a:pPr>
             <a:r>
-              <a:t>OUTLOOK SIGNALS</a:t>
+              <a:t>OUTLOOK AI SIGNALS</a:t>
             </a:r>
           </a:p>
         </p:txBody>
@@ -3015,6 +3034,7 @@
           <a:lstStyle xmlns:a="http://schemas.openxmlformats.org/drawingml/2006/main"/>
           <a:p xmlns:a="http://schemas.openxmlformats.org/drawingml/2006/main">
             <a:pPr algn="ctr">
+              <a:buNone/>
               <a:defRPr sz="4050" b="1">
                 <a:solidFill>
                   <a:srgbClr val="FFFFFF"/>
@@ -3033,7 +3053,7 @@
       </p:sp>
       <p:cxnSp>
         <p:nvCxnSpPr>
-          <p:cNvPr id="13" name=""/>
+          <p:cNvPr id="19" name=""/>
           <p:cNvCxnSpPr/>
           <p:nvPr/>
         </p:nvCxnSpPr>
@@ -3182,6 +3202,7 @@
           <a:lstStyle xmlns:a="http://schemas.openxmlformats.org/drawingml/2006/main"/>
           <a:p xmlns:a="http://schemas.openxmlformats.org/drawingml/2006/main">
             <a:pPr algn="ctr">
+              <a:buNone/>
               <a:defRPr sz="1650" b="1">
                 <a:solidFill>
                   <a:srgbClr val="FFFFFF"/>
@@ -3227,6 +3248,7 @@
           <a:lstStyle xmlns:a="http://schemas.openxmlformats.org/drawingml/2006/main"/>
           <a:p xmlns:a="http://schemas.openxmlformats.org/drawingml/2006/main">
             <a:pPr algn="ctr">
+              <a:buNone/>
               <a:defRPr sz="1650" b="1">
                 <a:solidFill>
                   <a:srgbClr val="FFFFFF"/>
@@ -3272,6 +3294,7 @@
           <a:lstStyle xmlns:a="http://schemas.openxmlformats.org/drawingml/2006/main"/>
           <a:p xmlns:a="http://schemas.openxmlformats.org/drawingml/2006/main">
             <a:pPr algn="ctr">
+              <a:buNone/>
               <a:defRPr sz="1650" b="1">
                 <a:solidFill>
                   <a:srgbClr val="FFFFFF"/>
@@ -3317,6 +3340,7 @@
           <a:lstStyle xmlns:a="http://schemas.openxmlformats.org/drawingml/2006/main"/>
           <a:p xmlns:a="http://schemas.openxmlformats.org/drawingml/2006/main">
             <a:pPr algn="ctr">
+              <a:buNone/>
               <a:defRPr sz="1800" b="0">
                 <a:solidFill>
                   <a:srgbClr val="F1DDD3"/>
@@ -3391,6 +3415,7 @@
           <a:lstStyle xmlns:a="http://schemas.openxmlformats.org/drawingml/2006/main"/>
           <a:p xmlns:a="http://schemas.openxmlformats.org/drawingml/2006/main">
             <a:pPr algn="l">
+              <a:buNone/>
               <a:defRPr sz="1125" b="1">
                 <a:solidFill>
                   <a:srgbClr val="B76043"/>
@@ -3401,7 +3426,7 @@
               </a:defRPr>
             </a:pPr>
             <a:r>
-              <a:t>OUTLOOK SIGNALS</a:t>
+              <a:t>OUTLOOK AI SIGNALS</a:t>
             </a:r>
           </a:p>
         </p:txBody>
@@ -3436,6 +3461,7 @@
           <a:lstStyle xmlns:a="http://schemas.openxmlformats.org/drawingml/2006/main"/>
           <a:p xmlns:a="http://schemas.openxmlformats.org/drawingml/2006/main">
             <a:pPr algn="l">
+              <a:buNone/>
               <a:defRPr sz="3150" b="1">
                 <a:solidFill>
                   <a:srgbClr val="24211D"/>
@@ -3453,7 +3479,7 @@
       </p:sp>
       <p:cxnSp>
         <p:nvCxnSpPr>
-          <p:cNvPr id="20" name=""/>
+          <p:cNvPr id="26" name=""/>
           <p:cNvCxnSpPr/>
           <p:nvPr/>
         </p:nvCxnSpPr>
@@ -3503,6 +3529,7 @@
           <a:lstStyle xmlns:a="http://schemas.openxmlformats.org/drawingml/2006/main"/>
           <a:p xmlns:a="http://schemas.openxmlformats.org/drawingml/2006/main">
             <a:pPr algn="r">
+              <a:buNone/>
               <a:defRPr sz="1050" b="0">
                 <a:solidFill>
                   <a:srgbClr val="716B63"/>
@@ -3583,6 +3610,7 @@
           <a:lstStyle xmlns:a="http://schemas.openxmlformats.org/drawingml/2006/main"/>
           <a:p xmlns:a="http://schemas.openxmlformats.org/drawingml/2006/main">
             <a:pPr algn="l">
+              <a:buNone/>
               <a:defRPr sz="1500" b="1">
                 <a:solidFill>
                   <a:srgbClr val="B76043"/>
@@ -3628,6 +3656,7 @@
           <a:lstStyle xmlns:a="http://schemas.openxmlformats.org/drawingml/2006/main"/>
           <a:p xmlns:a="http://schemas.openxmlformats.org/drawingml/2006/main">
             <a:pPr algn="l">
+              <a:buNone/>
               <a:defRPr sz="2250" b="1">
                 <a:solidFill>
                   <a:srgbClr val="24211D"/>
@@ -3673,6 +3702,7 @@
           <a:lstStyle xmlns:a="http://schemas.openxmlformats.org/drawingml/2006/main"/>
           <a:p xmlns:a="http://schemas.openxmlformats.org/drawingml/2006/main">
             <a:pPr algn="l">
+              <a:buNone/>
               <a:defRPr sz="1500" b="0">
                 <a:solidFill>
                   <a:srgbClr val="716B63"/>
@@ -3754,6 +3784,7 @@
           <a:lstStyle xmlns:a="http://schemas.openxmlformats.org/drawingml/2006/main"/>
           <a:p xmlns:a="http://schemas.openxmlformats.org/drawingml/2006/main">
             <a:pPr algn="l">
+              <a:buNone/>
               <a:defRPr sz="1500" b="1">
                 <a:solidFill>
                   <a:srgbClr val="667E95"/>
@@ -3799,6 +3830,7 @@
           <a:lstStyle xmlns:a="http://schemas.openxmlformats.org/drawingml/2006/main"/>
           <a:p xmlns:a="http://schemas.openxmlformats.org/drawingml/2006/main">
             <a:pPr algn="l">
+              <a:buNone/>
               <a:defRPr sz="2250" b="1">
                 <a:solidFill>
                   <a:srgbClr val="24211D"/>
@@ -3844,6 +3876,7 @@
           <a:lstStyle xmlns:a="http://schemas.openxmlformats.org/drawingml/2006/main"/>
           <a:p xmlns:a="http://schemas.openxmlformats.org/drawingml/2006/main">
             <a:pPr algn="l">
+              <a:buNone/>
               <a:defRPr sz="1500" b="0">
                 <a:solidFill>
                   <a:srgbClr val="716B63"/>
@@ -3925,6 +3958,7 @@
           <a:lstStyle xmlns:a="http://schemas.openxmlformats.org/drawingml/2006/main"/>
           <a:p xmlns:a="http://schemas.openxmlformats.org/drawingml/2006/main">
             <a:pPr algn="l">
+              <a:buNone/>
               <a:defRPr sz="1500" b="1">
                 <a:solidFill>
                   <a:srgbClr val="B76043"/>
@@ -3970,6 +4004,7 @@
           <a:lstStyle xmlns:a="http://schemas.openxmlformats.org/drawingml/2006/main"/>
           <a:p xmlns:a="http://schemas.openxmlformats.org/drawingml/2006/main">
             <a:pPr algn="l">
+              <a:buNone/>
               <a:defRPr sz="2250" b="1">
                 <a:solidFill>
                   <a:srgbClr val="24211D"/>
@@ -4015,6 +4050,7 @@
           <a:lstStyle xmlns:a="http://schemas.openxmlformats.org/drawingml/2006/main"/>
           <a:p xmlns:a="http://schemas.openxmlformats.org/drawingml/2006/main">
             <a:pPr algn="l">
+              <a:buNone/>
               <a:defRPr sz="1500" b="0">
                 <a:solidFill>
                   <a:srgbClr val="716B63"/>
@@ -4061,6 +4097,7 @@
           <a:lstStyle xmlns:a="http://schemas.openxmlformats.org/drawingml/2006/main"/>
           <a:p xmlns:a="http://schemas.openxmlformats.org/drawingml/2006/main">
             <a:pPr algn="ctr">
+              <a:buNone/>
               <a:defRPr sz="2025" b="1">
                 <a:solidFill>
                   <a:srgbClr val="24211D"/>
@@ -4135,6 +4172,7 @@
           <a:lstStyle xmlns:a="http://schemas.openxmlformats.org/drawingml/2006/main"/>
           <a:p xmlns:a="http://schemas.openxmlformats.org/drawingml/2006/main">
             <a:pPr algn="l">
+              <a:buNone/>
               <a:defRPr sz="1125" b="1">
                 <a:solidFill>
                   <a:srgbClr val="B76043"/>
@@ -4145,7 +4183,7 @@
               </a:defRPr>
             </a:pPr>
             <a:r>
-              <a:t>OUTLOOK SIGNALS</a:t>
+              <a:t>OUTLOOK AI SIGNALS</a:t>
             </a:r>
           </a:p>
         </p:txBody>
@@ -4180,6 +4218,7 @@
           <a:lstStyle xmlns:a="http://schemas.openxmlformats.org/drawingml/2006/main"/>
           <a:p xmlns:a="http://schemas.openxmlformats.org/drawingml/2006/main">
             <a:pPr algn="l">
+              <a:buNone/>
               <a:defRPr sz="3150" b="1">
                 <a:solidFill>
                   <a:srgbClr val="24211D"/>
@@ -4197,7 +4236,7 @@
       </p:sp>
       <p:cxnSp>
         <p:nvCxnSpPr>
-          <p:cNvPr id="25" name=""/>
+          <p:cNvPr id="61" name=""/>
           <p:cNvCxnSpPr/>
           <p:nvPr/>
         </p:nvCxnSpPr>
@@ -4247,6 +4286,7 @@
           <a:lstStyle xmlns:a="http://schemas.openxmlformats.org/drawingml/2006/main"/>
           <a:p xmlns:a="http://schemas.openxmlformats.org/drawingml/2006/main">
             <a:pPr algn="r">
+              <a:buNone/>
               <a:defRPr sz="1050" b="0">
                 <a:solidFill>
                   <a:srgbClr val="716B63"/>
@@ -4292,6 +4332,7 @@
           <a:lstStyle xmlns:a="http://schemas.openxmlformats.org/drawingml/2006/main"/>
           <a:p xmlns:a="http://schemas.openxmlformats.org/drawingml/2006/main">
             <a:pPr algn="l">
+              <a:buNone/>
               <a:defRPr sz="1650" b="1">
                 <a:solidFill>
                   <a:srgbClr val="716B63"/>
@@ -4337,6 +4378,7 @@
           <a:lstStyle xmlns:a="http://schemas.openxmlformats.org/drawingml/2006/main"/>
           <a:p xmlns:a="http://schemas.openxmlformats.org/drawingml/2006/main">
             <a:pPr algn="l">
+              <a:buNone/>
               <a:defRPr sz="2100" b="1">
                 <a:solidFill>
                   <a:srgbClr val="24211D"/>
@@ -4357,7 +4399,7 @@
       </p:sp>
       <p:cxnSp>
         <p:nvCxnSpPr>
-          <p:cNvPr id="29" name=""/>
+          <p:cNvPr id="65" name=""/>
           <p:cNvCxnSpPr/>
           <p:nvPr/>
         </p:nvCxnSpPr>
@@ -4440,6 +4482,7 @@
           <a:lstStyle xmlns:a="http://schemas.openxmlformats.org/drawingml/2006/main"/>
           <a:p xmlns:a="http://schemas.openxmlformats.org/drawingml/2006/main">
             <a:pPr algn="l">
+              <a:buNone/>
               <a:defRPr sz="1650" b="1">
                 <a:solidFill>
                   <a:srgbClr val="716B63"/>
@@ -4457,7 +4500,7 @@
       </p:sp>
       <p:cxnSp>
         <p:nvCxnSpPr>
-          <p:cNvPr id="32" name=""/>
+          <p:cNvPr id="68" name=""/>
           <p:cNvCxnSpPr/>
           <p:nvPr/>
         </p:nvCxnSpPr>
@@ -4479,7 +4522,7 @@
       </p:cxnSp>
       <p:cxnSp>
         <p:nvCxnSpPr>
-          <p:cNvPr id="33" name=""/>
+          <p:cNvPr id="69" name=""/>
           <p:cNvCxnSpPr/>
           <p:nvPr/>
         </p:nvCxnSpPr>
@@ -4501,7 +4544,7 @@
       </p:cxnSp>
       <p:cxnSp>
         <p:nvCxnSpPr>
-          <p:cNvPr id="34" name=""/>
+          <p:cNvPr id="70" name=""/>
           <p:cNvCxnSpPr/>
           <p:nvPr/>
         </p:nvCxnSpPr>
@@ -4523,7 +4566,7 @@
       </p:cxnSp>
       <p:cxnSp>
         <p:nvCxnSpPr>
-          <p:cNvPr id="35" name=""/>
+          <p:cNvPr id="71" name=""/>
           <p:cNvCxnSpPr/>
           <p:nvPr/>
         </p:nvCxnSpPr>
@@ -4545,7 +4588,7 @@
       </p:cxnSp>
       <p:cxnSp>
         <p:nvCxnSpPr>
-          <p:cNvPr id="36" name=""/>
+          <p:cNvPr id="72" name=""/>
           <p:cNvCxnSpPr/>
           <p:nvPr/>
         </p:nvCxnSpPr>
@@ -4567,7 +4610,7 @@
       </p:cxnSp>
       <p:cxnSp>
         <p:nvCxnSpPr>
-          <p:cNvPr id="37" name=""/>
+          <p:cNvPr id="73" name=""/>
           <p:cNvCxnSpPr/>
           <p:nvPr/>
         </p:nvCxnSpPr>
@@ -4589,7 +4632,7 @@
       </p:cxnSp>
       <p:cxnSp>
         <p:nvCxnSpPr>
-          <p:cNvPr id="38" name=""/>
+          <p:cNvPr id="74" name=""/>
           <p:cNvCxnSpPr/>
           <p:nvPr/>
         </p:nvCxnSpPr>
@@ -4611,7 +4654,7 @@
       </p:cxnSp>
       <p:cxnSp>
         <p:nvCxnSpPr>
-          <p:cNvPr id="39" name=""/>
+          <p:cNvPr id="75" name=""/>
           <p:cNvCxnSpPr/>
           <p:nvPr/>
         </p:nvCxnSpPr>
@@ -4633,7 +4676,7 @@
       </p:cxnSp>
       <p:cxnSp>
         <p:nvCxnSpPr>
-          <p:cNvPr id="40" name=""/>
+          <p:cNvPr id="76" name=""/>
           <p:cNvCxnSpPr/>
           <p:nvPr/>
         </p:nvCxnSpPr>
@@ -4716,6 +4759,7 @@
           <a:lstStyle xmlns:a="http://schemas.openxmlformats.org/drawingml/2006/main"/>
           <a:p xmlns:a="http://schemas.openxmlformats.org/drawingml/2006/main">
             <a:pPr algn="l">
+              <a:buNone/>
               <a:defRPr sz="2100" b="1">
                 <a:solidFill>
                   <a:srgbClr val="B76043"/>
@@ -4761,6 +4805,7 @@
           <a:lstStyle xmlns:a="http://schemas.openxmlformats.org/drawingml/2006/main"/>
           <a:p xmlns:a="http://schemas.openxmlformats.org/drawingml/2006/main">
             <a:pPr algn="l">
+              <a:buNone/>
               <a:defRPr sz="2100" b="1">
                 <a:solidFill>
                   <a:srgbClr val="667E95"/>
@@ -4806,6 +4851,7 @@
           <a:lstStyle xmlns:a="http://schemas.openxmlformats.org/drawingml/2006/main"/>
           <a:p xmlns:a="http://schemas.openxmlformats.org/drawingml/2006/main">
             <a:pPr algn="ctr">
+              <a:buNone/>
               <a:defRPr sz="1875" b="1">
                 <a:solidFill>
                   <a:srgbClr val="24211D"/>
@@ -4880,6 +4926,7 @@
           <a:lstStyle xmlns:a="http://schemas.openxmlformats.org/drawingml/2006/main"/>
           <a:p xmlns:a="http://schemas.openxmlformats.org/drawingml/2006/main">
             <a:pPr algn="l">
+              <a:buNone/>
               <a:defRPr sz="1125" b="1">
                 <a:solidFill>
                   <a:srgbClr val="B76043"/>
@@ -4890,7 +4937,7 @@
               </a:defRPr>
             </a:pPr>
             <a:r>
-              <a:t>OUTLOOK SIGNALS</a:t>
+              <a:t>OUTLOOK AI SIGNALS</a:t>
             </a:r>
           </a:p>
         </p:txBody>
@@ -4925,6 +4972,7 @@
           <a:lstStyle xmlns:a="http://schemas.openxmlformats.org/drawingml/2006/main"/>
           <a:p xmlns:a="http://schemas.openxmlformats.org/drawingml/2006/main">
             <a:pPr algn="l">
+              <a:buNone/>
               <a:defRPr sz="3150" b="1">
                 <a:solidFill>
                   <a:srgbClr val="24211D"/>
@@ -4942,7 +4990,7 @@
       </p:sp>
       <p:cxnSp>
         <p:nvCxnSpPr>
-          <p:cNvPr id="26" name=""/>
+          <p:cNvPr id="40" name=""/>
           <p:cNvCxnSpPr/>
           <p:nvPr/>
         </p:nvCxnSpPr>
@@ -4992,6 +5040,7 @@
           <a:lstStyle xmlns:a="http://schemas.openxmlformats.org/drawingml/2006/main"/>
           <a:p xmlns:a="http://schemas.openxmlformats.org/drawingml/2006/main">
             <a:pPr algn="r">
+              <a:buNone/>
               <a:defRPr sz="1050" b="0">
                 <a:solidFill>
                   <a:srgbClr val="716B63"/>
@@ -5009,7 +5058,7 @@
       </p:sp>
       <p:cxnSp>
         <p:nvCxnSpPr>
-          <p:cNvPr id="28" name=""/>
+          <p:cNvPr id="42" name=""/>
           <p:cNvCxnSpPr/>
           <p:nvPr/>
         </p:nvCxnSpPr>
@@ -5031,7 +5080,7 @@
       </p:cxnSp>
       <p:cxnSp>
         <p:nvCxnSpPr>
-          <p:cNvPr id="29" name=""/>
+          <p:cNvPr id="43" name=""/>
           <p:cNvCxnSpPr/>
           <p:nvPr/>
         </p:nvCxnSpPr>
@@ -5053,7 +5102,7 @@
       </p:cxnSp>
       <p:cxnSp>
         <p:nvCxnSpPr>
-          <p:cNvPr id="30" name=""/>
+          <p:cNvPr id="44" name=""/>
           <p:cNvCxnSpPr/>
           <p:nvPr/>
         </p:nvCxnSpPr>
@@ -5136,6 +5185,7 @@
           <a:lstStyle xmlns:a="http://schemas.openxmlformats.org/drawingml/2006/main"/>
           <a:p xmlns:a="http://schemas.openxmlformats.org/drawingml/2006/main">
             <a:pPr algn="ctr">
+              <a:buNone/>
               <a:defRPr sz="1500" b="1">
                 <a:solidFill>
                   <a:srgbClr val="FFFFFF"/>
@@ -5181,6 +5231,7 @@
           <a:lstStyle xmlns:a="http://schemas.openxmlformats.org/drawingml/2006/main"/>
           <a:p xmlns:a="http://schemas.openxmlformats.org/drawingml/2006/main">
             <a:pPr algn="ctr">
+              <a:buNone/>
               <a:defRPr sz="2025" b="1">
                 <a:solidFill>
                   <a:srgbClr val="24211D"/>
@@ -5226,6 +5277,7 @@
           <a:lstStyle xmlns:a="http://schemas.openxmlformats.org/drawingml/2006/main"/>
           <a:p xmlns:a="http://schemas.openxmlformats.org/drawingml/2006/main">
             <a:pPr algn="ctr">
+              <a:buNone/>
               <a:defRPr sz="1425" b="0">
                 <a:solidFill>
                   <a:srgbClr val="716B63"/>
@@ -5305,6 +5357,7 @@
           <a:lstStyle xmlns:a="http://schemas.openxmlformats.org/drawingml/2006/main"/>
           <a:p xmlns:a="http://schemas.openxmlformats.org/drawingml/2006/main">
             <a:pPr algn="ctr">
+              <a:buNone/>
               <a:defRPr sz="1500" b="1">
                 <a:solidFill>
                   <a:srgbClr val="FFFFFF"/>
@@ -5350,6 +5403,7 @@
           <a:lstStyle xmlns:a="http://schemas.openxmlformats.org/drawingml/2006/main"/>
           <a:p xmlns:a="http://schemas.openxmlformats.org/drawingml/2006/main">
             <a:pPr algn="ctr">
+              <a:buNone/>
               <a:defRPr sz="2025" b="1">
                 <a:solidFill>
                   <a:srgbClr val="24211D"/>
@@ -5395,6 +5449,7 @@
           <a:lstStyle xmlns:a="http://schemas.openxmlformats.org/drawingml/2006/main"/>
           <a:p xmlns:a="http://schemas.openxmlformats.org/drawingml/2006/main">
             <a:pPr algn="ctr">
+              <a:buNone/>
               <a:defRPr sz="1425" b="0">
                 <a:solidFill>
                   <a:srgbClr val="716B63"/>
@@ -5474,6 +5529,7 @@
           <a:lstStyle xmlns:a="http://schemas.openxmlformats.org/drawingml/2006/main"/>
           <a:p xmlns:a="http://schemas.openxmlformats.org/drawingml/2006/main">
             <a:pPr algn="ctr">
+              <a:buNone/>
               <a:defRPr sz="1500" b="1">
                 <a:solidFill>
                   <a:srgbClr val="FFFFFF"/>
@@ -5519,6 +5575,7 @@
           <a:lstStyle xmlns:a="http://schemas.openxmlformats.org/drawingml/2006/main"/>
           <a:p xmlns:a="http://schemas.openxmlformats.org/drawingml/2006/main">
             <a:pPr algn="ctr">
+              <a:buNone/>
               <a:defRPr sz="2025" b="1">
                 <a:solidFill>
                   <a:srgbClr val="24211D"/>
@@ -5564,6 +5621,7 @@
           <a:lstStyle xmlns:a="http://schemas.openxmlformats.org/drawingml/2006/main"/>
           <a:p xmlns:a="http://schemas.openxmlformats.org/drawingml/2006/main">
             <a:pPr algn="ctr">
+              <a:buNone/>
               <a:defRPr sz="1425" b="0">
                 <a:solidFill>
                   <a:srgbClr val="716B63"/>
@@ -5643,6 +5701,7 @@
           <a:lstStyle xmlns:a="http://schemas.openxmlformats.org/drawingml/2006/main"/>
           <a:p xmlns:a="http://schemas.openxmlformats.org/drawingml/2006/main">
             <a:pPr algn="ctr">
+              <a:buNone/>
               <a:defRPr sz="1500" b="1">
                 <a:solidFill>
                   <a:srgbClr val="FFFFFF"/>
@@ -5688,6 +5747,7 @@
           <a:lstStyle xmlns:a="http://schemas.openxmlformats.org/drawingml/2006/main"/>
           <a:p xmlns:a="http://schemas.openxmlformats.org/drawingml/2006/main">
             <a:pPr algn="ctr">
+              <a:buNone/>
               <a:defRPr sz="2025" b="1">
                 <a:solidFill>
                   <a:srgbClr val="24211D"/>
@@ -5733,6 +5793,7 @@
           <a:lstStyle xmlns:a="http://schemas.openxmlformats.org/drawingml/2006/main"/>
           <a:p xmlns:a="http://schemas.openxmlformats.org/drawingml/2006/main">
             <a:pPr algn="ctr">
+              <a:buNone/>
               <a:defRPr sz="1425" b="0">
                 <a:solidFill>
                   <a:srgbClr val="716B63"/>
@@ -5808,6 +5869,7 @@
           <a:lstStyle xmlns:a="http://schemas.openxmlformats.org/drawingml/2006/main"/>
           <a:p xmlns:a="http://schemas.openxmlformats.org/drawingml/2006/main">
             <a:pPr algn="l">
+              <a:buNone/>
               <a:defRPr sz="1125" b="1">
                 <a:solidFill>
                   <a:srgbClr val="B76043"/>
@@ -5818,7 +5880,7 @@
               </a:defRPr>
             </a:pPr>
             <a:r>
-              <a:t>OUTLOOK SIGNALS</a:t>
+              <a:t>OUTLOOK AI SIGNALS</a:t>
             </a:r>
           </a:p>
         </p:txBody>
@@ -5853,6 +5915,7 @@
           <a:lstStyle xmlns:a="http://schemas.openxmlformats.org/drawingml/2006/main"/>
           <a:p xmlns:a="http://schemas.openxmlformats.org/drawingml/2006/main">
             <a:pPr algn="l">
+              <a:buNone/>
               <a:defRPr sz="3150" b="1">
                 <a:solidFill>
                   <a:srgbClr val="24211D"/>
@@ -5870,7 +5933,7 @@
       </p:sp>
       <p:cxnSp>
         <p:nvCxnSpPr>
-          <p:cNvPr id="35" name=""/>
+          <p:cNvPr id="83" name=""/>
           <p:cNvCxnSpPr/>
           <p:nvPr/>
         </p:nvCxnSpPr>
@@ -5920,6 +5983,7 @@
           <a:lstStyle xmlns:a="http://schemas.openxmlformats.org/drawingml/2006/main"/>
           <a:p xmlns:a="http://schemas.openxmlformats.org/drawingml/2006/main">
             <a:pPr algn="r">
+              <a:buNone/>
               <a:defRPr sz="1050" b="0">
                 <a:solidFill>
                   <a:srgbClr val="716B63"/>
@@ -6000,6 +6064,7 @@
           <a:lstStyle xmlns:a="http://schemas.openxmlformats.org/drawingml/2006/main"/>
           <a:p xmlns:a="http://schemas.openxmlformats.org/drawingml/2006/main">
             <a:pPr algn="l">
+              <a:buNone/>
               <a:defRPr sz="2100" b="1">
                 <a:solidFill>
                   <a:srgbClr val="24211D"/>
@@ -6045,6 +6110,7 @@
           <a:lstStyle xmlns:a="http://schemas.openxmlformats.org/drawingml/2006/main"/>
           <a:p xmlns:a="http://schemas.openxmlformats.org/drawingml/2006/main">
             <a:pPr algn="r">
+              <a:buNone/>
               <a:defRPr sz="1200" b="0">
                 <a:solidFill>
                   <a:srgbClr val="716B63"/>
@@ -6125,6 +6191,7 @@
           <a:lstStyle xmlns:a="http://schemas.openxmlformats.org/drawingml/2006/main"/>
           <a:p xmlns:a="http://schemas.openxmlformats.org/drawingml/2006/main">
             <a:pPr algn="ctr">
+              <a:buNone/>
               <a:defRPr sz="1200" b="1">
                 <a:solidFill>
                   <a:srgbClr val="B76043"/>
@@ -6205,6 +6272,7 @@
           <a:lstStyle xmlns:a="http://schemas.openxmlformats.org/drawingml/2006/main"/>
           <a:p xmlns:a="http://schemas.openxmlformats.org/drawingml/2006/main">
             <a:pPr algn="ctr">
+              <a:buNone/>
               <a:defRPr sz="1200" b="1">
                 <a:solidFill>
                   <a:srgbClr val="716B63"/>
@@ -6222,7 +6290,7 @@
       </p:sp>
       <p:cxnSp>
         <p:nvCxnSpPr>
-          <p:cNvPr id="44" name=""/>
+          <p:cNvPr id="92" name=""/>
           <p:cNvCxnSpPr/>
           <p:nvPr/>
         </p:nvCxnSpPr>
@@ -6272,6 +6340,7 @@
           <a:lstStyle xmlns:a="http://schemas.openxmlformats.org/drawingml/2006/main"/>
           <a:p xmlns:a="http://schemas.openxmlformats.org/drawingml/2006/main">
             <a:pPr algn="l">
+              <a:buNone/>
               <a:defRPr sz="1650" b="1">
                 <a:solidFill>
                   <a:srgbClr val="24211D"/>
@@ -6317,6 +6386,7 @@
           <a:lstStyle xmlns:a="http://schemas.openxmlformats.org/drawingml/2006/main"/>
           <a:p xmlns:a="http://schemas.openxmlformats.org/drawingml/2006/main">
             <a:pPr algn="l">
+              <a:buNone/>
               <a:defRPr sz="1200" b="0">
                 <a:solidFill>
                   <a:srgbClr val="716B63"/>
@@ -6362,6 +6432,7 @@
           <a:lstStyle xmlns:a="http://schemas.openxmlformats.org/drawingml/2006/main"/>
           <a:p xmlns:a="http://schemas.openxmlformats.org/drawingml/2006/main">
             <a:pPr algn="r">
+              <a:buNone/>
               <a:defRPr sz="2100" b="1">
                 <a:solidFill>
                   <a:srgbClr val="B76043"/>
@@ -6407,6 +6478,7 @@
           <a:lstStyle xmlns:a="http://schemas.openxmlformats.org/drawingml/2006/main"/>
           <a:p xmlns:a="http://schemas.openxmlformats.org/drawingml/2006/main">
             <a:pPr algn="r">
+              <a:buNone/>
               <a:defRPr sz="1725" b="1">
                 <a:solidFill>
                   <a:srgbClr val="667E95"/>
@@ -6452,6 +6524,7 @@
           <a:lstStyle xmlns:a="http://schemas.openxmlformats.org/drawingml/2006/main"/>
           <a:p xmlns:a="http://schemas.openxmlformats.org/drawingml/2006/main">
             <a:pPr algn="r">
+              <a:buNone/>
               <a:defRPr sz="1200" b="0">
                 <a:solidFill>
                   <a:srgbClr val="716B63"/>
@@ -6469,7 +6542,7 @@
       </p:sp>
       <p:cxnSp>
         <p:nvCxnSpPr>
-          <p:cNvPr id="50" name=""/>
+          <p:cNvPr id="98" name=""/>
           <p:cNvCxnSpPr/>
           <p:nvPr/>
         </p:nvCxnSpPr>
@@ -6519,6 +6592,7 @@
           <a:lstStyle xmlns:a="http://schemas.openxmlformats.org/drawingml/2006/main"/>
           <a:p xmlns:a="http://schemas.openxmlformats.org/drawingml/2006/main">
             <a:pPr algn="l">
+              <a:buNone/>
               <a:defRPr sz="1650" b="1">
                 <a:solidFill>
                   <a:srgbClr val="24211D"/>
@@ -6564,6 +6638,7 @@
           <a:lstStyle xmlns:a="http://schemas.openxmlformats.org/drawingml/2006/main"/>
           <a:p xmlns:a="http://schemas.openxmlformats.org/drawingml/2006/main">
             <a:pPr algn="l">
+              <a:buNone/>
               <a:defRPr sz="1200" b="0">
                 <a:solidFill>
                   <a:srgbClr val="716B63"/>
@@ -6609,6 +6684,7 @@
           <a:lstStyle xmlns:a="http://schemas.openxmlformats.org/drawingml/2006/main"/>
           <a:p xmlns:a="http://schemas.openxmlformats.org/drawingml/2006/main">
             <a:pPr algn="r">
+              <a:buNone/>
               <a:defRPr sz="2100" b="1">
                 <a:solidFill>
                   <a:srgbClr val="B76043"/>
@@ -6654,6 +6730,7 @@
           <a:lstStyle xmlns:a="http://schemas.openxmlformats.org/drawingml/2006/main"/>
           <a:p xmlns:a="http://schemas.openxmlformats.org/drawingml/2006/main">
             <a:pPr algn="r">
+              <a:buNone/>
               <a:defRPr sz="1725" b="1">
                 <a:solidFill>
                   <a:srgbClr val="667E95"/>
@@ -6699,6 +6776,7 @@
           <a:lstStyle xmlns:a="http://schemas.openxmlformats.org/drawingml/2006/main"/>
           <a:p xmlns:a="http://schemas.openxmlformats.org/drawingml/2006/main">
             <a:pPr algn="r">
+              <a:buNone/>
               <a:defRPr sz="1200" b="0">
                 <a:solidFill>
                   <a:srgbClr val="716B63"/>
@@ -6716,7 +6794,7 @@
       </p:sp>
       <p:cxnSp>
         <p:nvCxnSpPr>
-          <p:cNvPr id="56" name=""/>
+          <p:cNvPr id="104" name=""/>
           <p:cNvCxnSpPr/>
           <p:nvPr/>
         </p:nvCxnSpPr>
@@ -6766,6 +6844,7 @@
           <a:lstStyle xmlns:a="http://schemas.openxmlformats.org/drawingml/2006/main"/>
           <a:p xmlns:a="http://schemas.openxmlformats.org/drawingml/2006/main">
             <a:pPr algn="l">
+              <a:buNone/>
               <a:defRPr sz="1650" b="1">
                 <a:solidFill>
                   <a:srgbClr val="24211D"/>
@@ -6811,6 +6890,7 @@
           <a:lstStyle xmlns:a="http://schemas.openxmlformats.org/drawingml/2006/main"/>
           <a:p xmlns:a="http://schemas.openxmlformats.org/drawingml/2006/main">
             <a:pPr algn="l">
+              <a:buNone/>
               <a:defRPr sz="1200" b="0">
                 <a:solidFill>
                   <a:srgbClr val="716B63"/>
@@ -6856,6 +6936,7 @@
           <a:lstStyle xmlns:a="http://schemas.openxmlformats.org/drawingml/2006/main"/>
           <a:p xmlns:a="http://schemas.openxmlformats.org/drawingml/2006/main">
             <a:pPr algn="r">
+              <a:buNone/>
               <a:defRPr sz="2100" b="1">
                 <a:solidFill>
                   <a:srgbClr val="B76043"/>
@@ -6901,6 +6982,7 @@
           <a:lstStyle xmlns:a="http://schemas.openxmlformats.org/drawingml/2006/main"/>
           <a:p xmlns:a="http://schemas.openxmlformats.org/drawingml/2006/main">
             <a:pPr algn="r">
+              <a:buNone/>
               <a:defRPr sz="1725" b="1">
                 <a:solidFill>
                   <a:srgbClr val="667E95"/>
@@ -6946,6 +7028,7 @@
           <a:lstStyle xmlns:a="http://schemas.openxmlformats.org/drawingml/2006/main"/>
           <a:p xmlns:a="http://schemas.openxmlformats.org/drawingml/2006/main">
             <a:pPr algn="r">
+              <a:buNone/>
               <a:defRPr sz="1200" b="0">
                 <a:solidFill>
                   <a:srgbClr val="716B63"/>
@@ -7026,6 +7109,7 @@
           <a:lstStyle xmlns:a="http://schemas.openxmlformats.org/drawingml/2006/main"/>
           <a:p xmlns:a="http://schemas.openxmlformats.org/drawingml/2006/main">
             <a:pPr algn="l">
+              <a:buNone/>
               <a:defRPr sz="1875" b="1">
                 <a:solidFill>
                   <a:srgbClr val="24211D"/>
@@ -7071,6 +7155,7 @@
           <a:lstStyle xmlns:a="http://schemas.openxmlformats.org/drawingml/2006/main"/>
           <a:p xmlns:a="http://schemas.openxmlformats.org/drawingml/2006/main">
             <a:pPr algn="l">
+              <a:buNone/>
               <a:defRPr sz="1500" b="0">
                 <a:solidFill>
                   <a:srgbClr val="716B63"/>
@@ -7148,6 +7233,7 @@
           <a:lstStyle xmlns:a="http://schemas.openxmlformats.org/drawingml/2006/main"/>
           <a:p xmlns:a="http://schemas.openxmlformats.org/drawingml/2006/main">
             <a:pPr algn="l">
+              <a:buNone/>
               <a:defRPr sz="1125" b="1">
                 <a:solidFill>
                   <a:srgbClr val="B76043"/>
@@ -7158,7 +7244,7 @@
               </a:defRPr>
             </a:pPr>
             <a:r>
-              <a:t>OUTLOOK SIGNALS</a:t>
+              <a:t>OUTLOOK AI SIGNALS</a:t>
             </a:r>
           </a:p>
         </p:txBody>
@@ -7193,6 +7279,7 @@
           <a:lstStyle xmlns:a="http://schemas.openxmlformats.org/drawingml/2006/main"/>
           <a:p xmlns:a="http://schemas.openxmlformats.org/drawingml/2006/main">
             <a:pPr algn="l">
+              <a:buNone/>
               <a:defRPr sz="3150" b="1">
                 <a:solidFill>
                   <a:srgbClr val="24211D"/>
@@ -7210,7 +7297,7 @@
       </p:sp>
       <p:cxnSp>
         <p:nvCxnSpPr>
-          <p:cNvPr id="16" name=""/>
+          <p:cNvPr id="38" name=""/>
           <p:cNvCxnSpPr/>
           <p:nvPr/>
         </p:nvCxnSpPr>
@@ -7260,6 +7347,7 @@
           <a:lstStyle xmlns:a="http://schemas.openxmlformats.org/drawingml/2006/main"/>
           <a:p xmlns:a="http://schemas.openxmlformats.org/drawingml/2006/main">
             <a:pPr algn="r">
+              <a:buNone/>
               <a:defRPr sz="1050" b="0">
                 <a:solidFill>
                   <a:srgbClr val="716B63"/>
@@ -7277,18 +7365,18 @@
       </p:sp>
       <p:pic>
         <p:nvPicPr>
-          <p:cNvPr id="18" name=""/>
+          <p:cNvPr id="40" name=""/>
           <p:cNvPicPr>
             <a:picLocks xmlns:a="http://schemas.openxmlformats.org/drawingml/2006/main" noChangeAspect="1"/>
           </p:cNvPicPr>
           <p:nvPr/>
         </p:nvPicPr>
         <p:blipFill>
-          <a:blip xmlns:r="http://schemas.openxmlformats.org/officeDocument/2006/relationships" xmlns:a="http://schemas.openxmlformats.org/drawingml/2006/main" r:embed="Rc4c3e1593f194a93"/>
+          <a:blip xmlns:r="http://schemas.openxmlformats.org/officeDocument/2006/relationships" xmlns:a="http://schemas.openxmlformats.org/drawingml/2006/main" r:embed="Rab130a3324344e4b"/>
           <a:stretch xmlns:a="http://schemas.openxmlformats.org/drawingml/2006/main"/>
         </p:blipFill>
         <p:spPr>
-          <a:xfrm xmlns:a="http://schemas.openxmlformats.org/drawingml/2006/main">
+          <a:xfrm xmlns:a="http://schemas.openxmlformats.org/drawingml/2006/main" flipH="0" flipV="0">
             <a:off x="495300" y="1669256"/>
             <a:ext cx="7239000" cy="4071938"/>
           </a:xfrm>
@@ -7360,6 +7448,7 @@
           <a:lstStyle xmlns:a="http://schemas.openxmlformats.org/drawingml/2006/main"/>
           <a:p xmlns:a="http://schemas.openxmlformats.org/drawingml/2006/main">
             <a:pPr algn="l">
+              <a:buNone/>
               <a:defRPr sz="1800" b="1">
                 <a:solidFill>
                   <a:srgbClr val="B76043"/>
@@ -7405,6 +7494,7 @@
           <a:lstStyle xmlns:a="http://schemas.openxmlformats.org/drawingml/2006/main"/>
           <a:p xmlns:a="http://schemas.openxmlformats.org/drawingml/2006/main">
             <a:pPr algn="l">
+              <a:buNone/>
               <a:defRPr sz="1350" b="0">
                 <a:solidFill>
                   <a:srgbClr val="716B63"/>
@@ -7450,6 +7540,7 @@
           <a:lstStyle xmlns:a="http://schemas.openxmlformats.org/drawingml/2006/main"/>
           <a:p xmlns:a="http://schemas.openxmlformats.org/drawingml/2006/main">
             <a:pPr algn="l">
+              <a:buNone/>
               <a:defRPr sz="4200" b="1">
                 <a:solidFill>
                   <a:srgbClr val="B76043"/>
@@ -7467,7 +7558,7 @@
       </p:sp>
       <p:cxnSp>
         <p:nvCxnSpPr>
-          <p:cNvPr id="23" name=""/>
+          <p:cNvPr id="45" name=""/>
           <p:cNvCxnSpPr/>
           <p:nvPr/>
         </p:nvCxnSpPr>
@@ -7517,6 +7608,7 @@
           <a:lstStyle xmlns:a="http://schemas.openxmlformats.org/drawingml/2006/main"/>
           <a:p xmlns:a="http://schemas.openxmlformats.org/drawingml/2006/main">
             <a:pPr algn="l">
+              <a:buNone/>
               <a:defRPr sz="1950" b="1">
                 <a:solidFill>
                   <a:srgbClr val="B76043"/>
@@ -7562,6 +7654,7 @@
           <a:lstStyle xmlns:a="http://schemas.openxmlformats.org/drawingml/2006/main"/>
           <a:p xmlns:a="http://schemas.openxmlformats.org/drawingml/2006/main">
             <a:pPr algn="l">
+              <a:buNone/>
               <a:defRPr sz="1950" b="1">
                 <a:solidFill>
                   <a:srgbClr val="667E95"/>
@@ -7607,6 +7700,7 @@
           <a:lstStyle xmlns:a="http://schemas.openxmlformats.org/drawingml/2006/main"/>
           <a:p xmlns:a="http://schemas.openxmlformats.org/drawingml/2006/main">
             <a:pPr algn="l">
+              <a:buNone/>
               <a:defRPr sz="1500" b="0">
                 <a:solidFill>
                   <a:srgbClr val="716B63"/>
@@ -7684,6 +7778,7 @@
           <a:lstStyle xmlns:a="http://schemas.openxmlformats.org/drawingml/2006/main"/>
           <a:p xmlns:a="http://schemas.openxmlformats.org/drawingml/2006/main">
             <a:pPr algn="l">
+              <a:buNone/>
               <a:defRPr sz="1125" b="1">
                 <a:solidFill>
                   <a:srgbClr val="B76043"/>
@@ -7694,7 +7789,7 @@
               </a:defRPr>
             </a:pPr>
             <a:r>
-              <a:t>OUTLOOK SIGNALS</a:t>
+              <a:t>OUTLOOK AI SIGNALS</a:t>
             </a:r>
           </a:p>
         </p:txBody>
@@ -7729,6 +7824,7 @@
           <a:lstStyle xmlns:a="http://schemas.openxmlformats.org/drawingml/2006/main"/>
           <a:p xmlns:a="http://schemas.openxmlformats.org/drawingml/2006/main">
             <a:pPr algn="l">
+              <a:buNone/>
               <a:defRPr sz="3150" b="1">
                 <a:solidFill>
                   <a:srgbClr val="24211D"/>
@@ -7746,7 +7842,7 @@
       </p:sp>
       <p:cxnSp>
         <p:nvCxnSpPr>
-          <p:cNvPr id="31" name=""/>
+          <p:cNvPr id="87" name=""/>
           <p:cNvCxnSpPr/>
           <p:nvPr/>
         </p:nvCxnSpPr>
@@ -7796,6 +7892,7 @@
           <a:lstStyle xmlns:a="http://schemas.openxmlformats.org/drawingml/2006/main"/>
           <a:p xmlns:a="http://schemas.openxmlformats.org/drawingml/2006/main">
             <a:pPr algn="r">
+              <a:buNone/>
               <a:defRPr sz="1050" b="0">
                 <a:solidFill>
                   <a:srgbClr val="716B63"/>
@@ -7813,21 +7910,21 @@
       </p:sp>
       <p:pic>
         <p:nvPicPr>
-          <p:cNvPr id="33" name=""/>
+          <p:cNvPr id="89" name=""/>
           <p:cNvPicPr>
             <a:picLocks xmlns:a="http://schemas.openxmlformats.org/drawingml/2006/main" noChangeAspect="1"/>
           </p:cNvPicPr>
           <p:nvPr/>
         </p:nvPicPr>
         <p:blipFill>
-          <a:blip xmlns:r="http://schemas.openxmlformats.org/officeDocument/2006/relationships" xmlns:a="http://schemas.openxmlformats.org/drawingml/2006/main" r:embed="R1ca19a1813134ea1"/>
+          <a:blip xmlns:r="http://schemas.openxmlformats.org/officeDocument/2006/relationships" xmlns:a="http://schemas.openxmlformats.org/drawingml/2006/main" r:embed="R89b1efb6ed594c04"/>
           <a:srcRect xmlns:a="http://schemas.openxmlformats.org/drawingml/2006/main" l="18378" t="0" r="18378" b="0"/>
           <a:stretch xmlns:a="http://schemas.openxmlformats.org/drawingml/2006/main">
             <a:fillRect l="0" t="0" r="0" b="0"/>
           </a:stretch>
         </p:blipFill>
         <p:spPr>
-          <a:xfrm xmlns:a="http://schemas.openxmlformats.org/drawingml/2006/main">
+          <a:xfrm xmlns:a="http://schemas.openxmlformats.org/drawingml/2006/main" flipH="0" flipV="0">
             <a:off x="7543800" y="1752600"/>
             <a:ext cx="3962400" cy="3524250"/>
           </a:xfrm>
@@ -7871,7 +7968,7 @@
       </p:sp>
       <p:cxnSp>
         <p:nvCxnSpPr>
-          <p:cNvPr id="35" name=""/>
+          <p:cNvPr id="91" name=""/>
           <p:cNvCxnSpPr/>
           <p:nvPr/>
         </p:nvCxnSpPr>
@@ -7893,7 +7990,7 @@
       </p:cxnSp>
       <p:cxnSp>
         <p:nvCxnSpPr>
-          <p:cNvPr id="36" name=""/>
+          <p:cNvPr id="92" name=""/>
           <p:cNvCxnSpPr/>
           <p:nvPr/>
         </p:nvCxnSpPr>
@@ -7915,7 +8012,7 @@
       </p:cxnSp>
       <p:cxnSp>
         <p:nvCxnSpPr>
-          <p:cNvPr id="37" name=""/>
+          <p:cNvPr id="93" name=""/>
           <p:cNvCxnSpPr/>
           <p:nvPr/>
         </p:nvCxnSpPr>
@@ -8000,6 +8097,7 @@
           <a:lstStyle xmlns:a="http://schemas.openxmlformats.org/drawingml/2006/main"/>
           <a:p xmlns:a="http://schemas.openxmlformats.org/drawingml/2006/main">
             <a:pPr algn="l">
+              <a:buNone/>
               <a:defRPr sz="1125" b="1">
                 <a:solidFill>
                   <a:srgbClr val="B76043"/>
@@ -8045,6 +8143,7 @@
           <a:lstStyle xmlns:a="http://schemas.openxmlformats.org/drawingml/2006/main"/>
           <a:p xmlns:a="http://schemas.openxmlformats.org/drawingml/2006/main">
             <a:pPr algn="l">
+              <a:buNone/>
               <a:defRPr sz="1650" b="1">
                 <a:solidFill>
                   <a:srgbClr val="24211D"/>
@@ -8090,6 +8189,7 @@
           <a:lstStyle xmlns:a="http://schemas.openxmlformats.org/drawingml/2006/main"/>
           <a:p xmlns:a="http://schemas.openxmlformats.org/drawingml/2006/main">
             <a:pPr algn="l">
+              <a:buNone/>
               <a:defRPr sz="1350" b="0">
                 <a:solidFill>
                   <a:srgbClr val="716B63"/>
@@ -8172,6 +8272,7 @@
           <a:lstStyle xmlns:a="http://schemas.openxmlformats.org/drawingml/2006/main"/>
           <a:p xmlns:a="http://schemas.openxmlformats.org/drawingml/2006/main">
             <a:pPr algn="l">
+              <a:buNone/>
               <a:defRPr sz="1125" b="1">
                 <a:solidFill>
                   <a:srgbClr val="B76043"/>
@@ -8217,6 +8318,7 @@
           <a:lstStyle xmlns:a="http://schemas.openxmlformats.org/drawingml/2006/main"/>
           <a:p xmlns:a="http://schemas.openxmlformats.org/drawingml/2006/main">
             <a:pPr algn="l">
+              <a:buNone/>
               <a:defRPr sz="1650" b="1">
                 <a:solidFill>
                   <a:srgbClr val="24211D"/>
@@ -8262,6 +8364,7 @@
           <a:lstStyle xmlns:a="http://schemas.openxmlformats.org/drawingml/2006/main"/>
           <a:p xmlns:a="http://schemas.openxmlformats.org/drawingml/2006/main">
             <a:pPr algn="l">
+              <a:buNone/>
               <a:defRPr sz="1350" b="0">
                 <a:solidFill>
                   <a:srgbClr val="716B63"/>
@@ -8343,6 +8446,7 @@
           <a:lstStyle xmlns:a="http://schemas.openxmlformats.org/drawingml/2006/main"/>
           <a:p xmlns:a="http://schemas.openxmlformats.org/drawingml/2006/main">
             <a:pPr algn="l">
+              <a:buNone/>
               <a:defRPr sz="1125" b="1">
                 <a:solidFill>
                   <a:srgbClr val="B76043"/>
@@ -8388,6 +8492,7 @@
           <a:lstStyle xmlns:a="http://schemas.openxmlformats.org/drawingml/2006/main"/>
           <a:p xmlns:a="http://schemas.openxmlformats.org/drawingml/2006/main">
             <a:pPr algn="l">
+              <a:buNone/>
               <a:defRPr sz="1650" b="1">
                 <a:solidFill>
                   <a:srgbClr val="24211D"/>
@@ -8433,6 +8538,7 @@
           <a:lstStyle xmlns:a="http://schemas.openxmlformats.org/drawingml/2006/main"/>
           <a:p xmlns:a="http://schemas.openxmlformats.org/drawingml/2006/main">
             <a:pPr algn="l">
+              <a:buNone/>
               <a:defRPr sz="1350" b="0">
                 <a:solidFill>
                   <a:srgbClr val="716B63"/>
@@ -8514,6 +8620,7 @@
           <a:lstStyle xmlns:a="http://schemas.openxmlformats.org/drawingml/2006/main"/>
           <a:p xmlns:a="http://schemas.openxmlformats.org/drawingml/2006/main">
             <a:pPr algn="l">
+              <a:buNone/>
               <a:defRPr sz="1125" b="1">
                 <a:solidFill>
                   <a:srgbClr val="B76043"/>
@@ -8559,6 +8666,7 @@
           <a:lstStyle xmlns:a="http://schemas.openxmlformats.org/drawingml/2006/main"/>
           <a:p xmlns:a="http://schemas.openxmlformats.org/drawingml/2006/main">
             <a:pPr algn="l">
+              <a:buNone/>
               <a:defRPr sz="1650" b="1">
                 <a:solidFill>
                   <a:srgbClr val="24211D"/>
@@ -8604,6 +8712,7 @@
           <a:lstStyle xmlns:a="http://schemas.openxmlformats.org/drawingml/2006/main"/>
           <a:p xmlns:a="http://schemas.openxmlformats.org/drawingml/2006/main">
             <a:pPr algn="l">
+              <a:buNone/>
               <a:defRPr sz="1350" b="0">
                 <a:solidFill>
                   <a:srgbClr val="716B63"/>
@@ -8650,6 +8759,7 @@
           <a:lstStyle xmlns:a="http://schemas.openxmlformats.org/drawingml/2006/main"/>
           <a:p xmlns:a="http://schemas.openxmlformats.org/drawingml/2006/main">
             <a:pPr algn="ctr">
+              <a:buNone/>
               <a:defRPr sz="1350" b="1">
                 <a:solidFill>
                   <a:srgbClr val="B76043"/>
@@ -8667,7 +8777,7 @@
       </p:sp>
       <p:cxnSp>
         <p:nvCxnSpPr>
-          <p:cNvPr id="55" name=""/>
+          <p:cNvPr id="111" name=""/>
           <p:cNvCxnSpPr/>
           <p:nvPr/>
         </p:nvCxnSpPr>
@@ -8717,6 +8827,7 @@
           <a:lstStyle xmlns:a="http://schemas.openxmlformats.org/drawingml/2006/main"/>
           <a:p xmlns:a="http://schemas.openxmlformats.org/drawingml/2006/main">
             <a:pPr algn="ctr">
+              <a:buNone/>
               <a:defRPr sz="1500" b="0">
                 <a:solidFill>
                   <a:srgbClr val="716B63"/>
@@ -8791,6 +8902,7 @@
           <a:lstStyle xmlns:a="http://schemas.openxmlformats.org/drawingml/2006/main"/>
           <a:p xmlns:a="http://schemas.openxmlformats.org/drawingml/2006/main">
             <a:pPr algn="l">
+              <a:buNone/>
               <a:defRPr sz="1125" b="1">
                 <a:solidFill>
                   <a:srgbClr val="B76043"/>
@@ -8801,7 +8913,7 @@
               </a:defRPr>
             </a:pPr>
             <a:r>
-              <a:t>OUTLOOK SIGNALS</a:t>
+              <a:t>OUTLOOK AI SIGNALS</a:t>
             </a:r>
           </a:p>
         </p:txBody>
@@ -8836,6 +8948,7 @@
           <a:lstStyle xmlns:a="http://schemas.openxmlformats.org/drawingml/2006/main"/>
           <a:p xmlns:a="http://schemas.openxmlformats.org/drawingml/2006/main">
             <a:pPr algn="l">
+              <a:buNone/>
               <a:defRPr sz="3150" b="1">
                 <a:solidFill>
                   <a:srgbClr val="24211D"/>
@@ -8853,7 +8966,7 @@
       </p:sp>
       <p:cxnSp>
         <p:nvCxnSpPr>
-          <p:cNvPr id="20" name=""/>
+          <p:cNvPr id="26" name=""/>
           <p:cNvCxnSpPr/>
           <p:nvPr/>
         </p:nvCxnSpPr>
@@ -8903,6 +9016,7 @@
           <a:lstStyle xmlns:a="http://schemas.openxmlformats.org/drawingml/2006/main"/>
           <a:p xmlns:a="http://schemas.openxmlformats.org/drawingml/2006/main">
             <a:pPr algn="r">
+              <a:buNone/>
               <a:defRPr sz="1050" b="0">
                 <a:solidFill>
                   <a:srgbClr val="716B63"/>
@@ -9088,6 +9202,7 @@
           <a:lstStyle xmlns:a="http://schemas.openxmlformats.org/drawingml/2006/main"/>
           <a:p xmlns:a="http://schemas.openxmlformats.org/drawingml/2006/main">
             <a:pPr algn="l">
+              <a:buNone/>
               <a:defRPr sz="1500" b="1">
                 <a:solidFill>
                   <a:srgbClr val="716B63"/>
@@ -9133,6 +9248,7 @@
           <a:lstStyle xmlns:a="http://schemas.openxmlformats.org/drawingml/2006/main"/>
           <a:p xmlns:a="http://schemas.openxmlformats.org/drawingml/2006/main">
             <a:pPr algn="l">
+              <a:buNone/>
               <a:defRPr sz="1500" b="1">
                 <a:solidFill>
                   <a:srgbClr val="667E95"/>
@@ -9178,6 +9294,7 @@
           <a:lstStyle xmlns:a="http://schemas.openxmlformats.org/drawingml/2006/main"/>
           <a:p xmlns:a="http://schemas.openxmlformats.org/drawingml/2006/main">
             <a:pPr algn="l">
+              <a:buNone/>
               <a:defRPr sz="1500" b="1">
                 <a:solidFill>
                   <a:srgbClr val="B76043"/>
@@ -9223,6 +9340,7 @@
           <a:lstStyle xmlns:a="http://schemas.openxmlformats.org/drawingml/2006/main"/>
           <a:p xmlns:a="http://schemas.openxmlformats.org/drawingml/2006/main">
             <a:pPr algn="ctr">
+              <a:buNone/>
               <a:defRPr sz="2025" b="1">
                 <a:solidFill>
                   <a:srgbClr val="FFFFFF"/>
@@ -9268,6 +9386,7 @@
           <a:lstStyle xmlns:a="http://schemas.openxmlformats.org/drawingml/2006/main"/>
           <a:p xmlns:a="http://schemas.openxmlformats.org/drawingml/2006/main">
             <a:pPr algn="l">
+              <a:buNone/>
               <a:defRPr sz="1725" b="1">
                 <a:solidFill>
                   <a:srgbClr val="24211D"/>
@@ -9313,6 +9432,7 @@
           <a:lstStyle xmlns:a="http://schemas.openxmlformats.org/drawingml/2006/main"/>
           <a:p xmlns:a="http://schemas.openxmlformats.org/drawingml/2006/main">
             <a:pPr algn="l">
+              <a:buNone/>
               <a:defRPr sz="1725" b="1">
                 <a:solidFill>
                   <a:srgbClr val="24211D"/>
@@ -9358,6 +9478,7 @@
           <a:lstStyle xmlns:a="http://schemas.openxmlformats.org/drawingml/2006/main"/>
           <a:p xmlns:a="http://schemas.openxmlformats.org/drawingml/2006/main">
             <a:pPr algn="l">
+              <a:buNone/>
               <a:defRPr sz="1725" b="1">
                 <a:solidFill>
                   <a:srgbClr val="24211D"/>
@@ -9403,6 +9524,7 @@
           <a:lstStyle xmlns:a="http://schemas.openxmlformats.org/drawingml/2006/main"/>
           <a:p xmlns:a="http://schemas.openxmlformats.org/drawingml/2006/main">
             <a:pPr algn="l">
+              <a:buNone/>
               <a:defRPr sz="1725" b="1">
                 <a:solidFill>
                   <a:srgbClr val="24211D"/>
@@ -9448,6 +9570,7 @@
           <a:lstStyle xmlns:a="http://schemas.openxmlformats.org/drawingml/2006/main"/>
           <a:p xmlns:a="http://schemas.openxmlformats.org/drawingml/2006/main">
             <a:pPr algn="ctr">
+              <a:buNone/>
               <a:defRPr sz="1650" b="1">
                 <a:solidFill>
                   <a:srgbClr val="B76043"/>
@@ -9522,6 +9645,7 @@
           <a:lstStyle xmlns:a="http://schemas.openxmlformats.org/drawingml/2006/main"/>
           <a:p xmlns:a="http://schemas.openxmlformats.org/drawingml/2006/main">
             <a:pPr algn="l">
+              <a:buNone/>
               <a:defRPr sz="1125" b="1">
                 <a:solidFill>
                   <a:srgbClr val="B76043"/>
@@ -9532,7 +9656,7 @@
               </a:defRPr>
             </a:pPr>
             <a:r>
-              <a:t>OUTLOOK SIGNALS</a:t>
+              <a:t>OUTLOOK AI SIGNALS</a:t>
             </a:r>
           </a:p>
         </p:txBody>
@@ -9567,6 +9691,7 @@
           <a:lstStyle xmlns:a="http://schemas.openxmlformats.org/drawingml/2006/main"/>
           <a:p xmlns:a="http://schemas.openxmlformats.org/drawingml/2006/main">
             <a:pPr algn="l">
+              <a:buNone/>
               <a:defRPr sz="3150" b="1">
                 <a:solidFill>
                   <a:srgbClr val="24211D"/>
@@ -9584,7 +9709,7 @@
       </p:sp>
       <p:cxnSp>
         <p:nvCxnSpPr>
-          <p:cNvPr id="27" name=""/>
+          <p:cNvPr id="47" name=""/>
           <p:cNvCxnSpPr/>
           <p:nvPr/>
         </p:nvCxnSpPr>
@@ -9634,6 +9759,7 @@
           <a:lstStyle xmlns:a="http://schemas.openxmlformats.org/drawingml/2006/main"/>
           <a:p xmlns:a="http://schemas.openxmlformats.org/drawingml/2006/main">
             <a:pPr algn="r">
+              <a:buNone/>
               <a:defRPr sz="1050" b="0">
                 <a:solidFill>
                   <a:srgbClr val="716B63"/>
@@ -9651,7 +9777,7 @@
       </p:sp>
       <p:cxnSp>
         <p:nvCxnSpPr>
-          <p:cNvPr id="29" name=""/>
+          <p:cNvPr id="49" name=""/>
           <p:cNvCxnSpPr/>
           <p:nvPr/>
         </p:nvCxnSpPr>
@@ -9673,7 +9799,7 @@
       </p:cxnSp>
       <p:cxnSp>
         <p:nvCxnSpPr>
-          <p:cNvPr id="30" name=""/>
+          <p:cNvPr id="50" name=""/>
           <p:cNvCxnSpPr/>
           <p:nvPr/>
         </p:nvCxnSpPr>
@@ -9695,7 +9821,7 @@
       </p:cxnSp>
       <p:cxnSp>
         <p:nvCxnSpPr>
-          <p:cNvPr id="31" name=""/>
+          <p:cNvPr id="51" name=""/>
           <p:cNvCxnSpPr/>
           <p:nvPr/>
         </p:nvCxnSpPr>
@@ -9717,7 +9843,7 @@
       </p:cxnSp>
       <p:cxnSp>
         <p:nvCxnSpPr>
-          <p:cNvPr id="32" name=""/>
+          <p:cNvPr id="52" name=""/>
           <p:cNvCxnSpPr/>
           <p:nvPr/>
         </p:nvCxnSpPr>
@@ -9739,7 +9865,7 @@
       </p:cxnSp>
       <p:cxnSp>
         <p:nvCxnSpPr>
-          <p:cNvPr id="33" name=""/>
+          <p:cNvPr id="53" name=""/>
           <p:cNvCxnSpPr/>
           <p:nvPr/>
         </p:nvCxnSpPr>
@@ -9761,7 +9887,7 @@
       </p:cxnSp>
       <p:cxnSp>
         <p:nvCxnSpPr>
-          <p:cNvPr id="34" name=""/>
+          <p:cNvPr id="54" name=""/>
           <p:cNvCxnSpPr/>
           <p:nvPr/>
         </p:nvCxnSpPr>
@@ -10021,6 +10147,7 @@
           <a:lstStyle xmlns:a="http://schemas.openxmlformats.org/drawingml/2006/main"/>
           <a:p xmlns:a="http://schemas.openxmlformats.org/drawingml/2006/main">
             <a:pPr algn="ctr">
+              <a:buNone/>
               <a:defRPr sz="1725" b="1">
                 <a:solidFill>
                   <a:srgbClr val="24211D"/>
@@ -10066,6 +10193,7 @@
           <a:lstStyle xmlns:a="http://schemas.openxmlformats.org/drawingml/2006/main"/>
           <a:p xmlns:a="http://schemas.openxmlformats.org/drawingml/2006/main">
             <a:pPr algn="ctr">
+              <a:buNone/>
               <a:defRPr sz="1650" b="1">
                 <a:solidFill>
                   <a:srgbClr val="24211D"/>
@@ -10112,6 +10240,7 @@
           <a:lstStyle xmlns:a="http://schemas.openxmlformats.org/drawingml/2006/main"/>
           <a:p xmlns:a="http://schemas.openxmlformats.org/drawingml/2006/main">
             <a:pPr algn="ctr">
+              <a:buNone/>
               <a:defRPr sz="1650" b="1">
                 <a:solidFill>
                   <a:srgbClr val="24211D"/>
@@ -10157,6 +10286,7 @@
           <a:lstStyle xmlns:a="http://schemas.openxmlformats.org/drawingml/2006/main"/>
           <a:p xmlns:a="http://schemas.openxmlformats.org/drawingml/2006/main">
             <a:pPr algn="ctr">
+              <a:buNone/>
               <a:defRPr sz="1650" b="1">
                 <a:solidFill>
                   <a:srgbClr val="24211D"/>
@@ -10202,6 +10332,7 @@
           <a:lstStyle xmlns:a="http://schemas.openxmlformats.org/drawingml/2006/main"/>
           <a:p xmlns:a="http://schemas.openxmlformats.org/drawingml/2006/main">
             <a:pPr algn="ctr">
+              <a:buNone/>
               <a:defRPr sz="1650" b="1">
                 <a:solidFill>
                   <a:srgbClr val="24211D"/>
@@ -10247,6 +10378,7 @@
           <a:lstStyle xmlns:a="http://schemas.openxmlformats.org/drawingml/2006/main"/>
           <a:p xmlns:a="http://schemas.openxmlformats.org/drawingml/2006/main">
             <a:pPr algn="ctr">
+              <a:buNone/>
               <a:defRPr sz="1650" b="1">
                 <a:solidFill>
                   <a:srgbClr val="B76043"/>
@@ -10292,6 +10424,7 @@
           <a:lstStyle xmlns:a="http://schemas.openxmlformats.org/drawingml/2006/main"/>
           <a:p xmlns:a="http://schemas.openxmlformats.org/drawingml/2006/main">
             <a:pPr algn="ctr">
+              <a:buNone/>
               <a:defRPr sz="1500" b="1">
                 <a:solidFill>
                   <a:srgbClr val="667E95"/>
@@ -10337,6 +10470,7 @@
           <a:lstStyle xmlns:a="http://schemas.openxmlformats.org/drawingml/2006/main"/>
           <a:p xmlns:a="http://schemas.openxmlformats.org/drawingml/2006/main">
             <a:pPr algn="ctr">
+              <a:buNone/>
               <a:defRPr sz="1500" b="1">
                 <a:solidFill>
                   <a:srgbClr val="B76043"/>
